--- a/추가산출물/team10중간발표자료.pptx
+++ b/추가산출물/team10중간발표자료.pptx
@@ -4635,8 +4635,8 @@
         </p:nvSpPr>
         <p:spPr>
           <a:xfrm>
-            <a:off x="1285875" y="2123480"/>
-            <a:ext cx="5715000" cy="396262"/>
+            <a:off x="1285874" y="2123480"/>
+            <a:ext cx="7214387" cy="189411"/>
           </a:xfrm>
           <a:prstGeom prst="rect">
             <a:avLst/>
@@ -4808,8 +4808,8 @@
         </p:nvSpPr>
         <p:spPr>
           <a:xfrm>
-            <a:off x="1312664" y="2993231"/>
-            <a:ext cx="5715000" cy="396262"/>
+            <a:off x="1312663" y="2993231"/>
+            <a:ext cx="6558491" cy="189411"/>
           </a:xfrm>
           <a:prstGeom prst="rect">
             <a:avLst/>
@@ -4838,7 +4838,29 @@
                 <a:ea typeface="Inter" pitchFamily="34" charset="-122"/>
                 <a:cs typeface="Inter" pitchFamily="34" charset="-120"/>
               </a:rPr>
-              <a:t>베이스라인 모델(단일 결정 트리)과 고급 모델(Random Forest, XGBoost) 간의 성능 비교 실험을 </a:t>
+              <a:t>베이스라인 모델(단일 결정 트리)과 고급 모델(Random Forest, XGBoost) 간의 성능 비교 </a:t>
+            </a:r>
+            <a:r>
+              <a:rPr lang="en-US" sz="1050" dirty="0" err="1">
+                <a:solidFill>
+                  <a:srgbClr val="666666"/>
+                </a:solidFill>
+                <a:latin typeface="Inter" pitchFamily="34" charset="0"/>
+                <a:ea typeface="Inter" pitchFamily="34" charset="-122"/>
+                <a:cs typeface="Inter" pitchFamily="34" charset="-120"/>
+              </a:rPr>
+              <a:t>실험을</a:t>
+            </a:r>
+            <a:r>
+              <a:rPr lang="en-US" sz="1050" dirty="0">
+                <a:solidFill>
+                  <a:srgbClr val="666666"/>
+                </a:solidFill>
+                <a:latin typeface="Inter" pitchFamily="34" charset="0"/>
+                <a:ea typeface="Inter" pitchFamily="34" charset="-122"/>
+                <a:cs typeface="Inter" pitchFamily="34" charset="-120"/>
+              </a:rPr>
+              <a:t> </a:t>
             </a:r>
             <a:r>
               <a:rPr lang="en-US" sz="1050" dirty="0" err="1">
@@ -4982,7 +5004,7 @@
         <p:spPr>
           <a:xfrm>
             <a:off x="1319808" y="3862983"/>
-            <a:ext cx="5715000" cy="396262"/>
+            <a:ext cx="6741542" cy="189411"/>
           </a:xfrm>
           <a:prstGeom prst="rect">
             <a:avLst/>

--- a/추가산출물/team10중간발표자료.pptx
+++ b/추가산출물/team10중간발표자료.pptx
@@ -1475,7 +1475,7 @@
         <p:spPr>
           <a:xfrm>
             <a:off x="571500" y="1882378"/>
-            <a:ext cx="3786188" cy="964110"/>
+            <a:ext cx="3876142" cy="1210331"/>
           </a:xfrm>
           <a:prstGeom prst="rect">
             <a:avLst/>
@@ -1504,7 +1504,7 @@
                 <a:ea typeface="Inter" pitchFamily="34" charset="-122"/>
                 <a:cs typeface="Inter" pitchFamily="34" charset="-120"/>
               </a:rPr>
-              <a:t>금융 시계열 특유의 결측치, 휴장일, 이상치 문제를 해결하기 위한 정제 </a:t>
+              <a:t> </a:t>
             </a:r>
             <a:r>
               <a:rPr lang="en-US" sz="1250" dirty="0" err="1">
@@ -1515,6 +1515,28 @@
                 <a:ea typeface="Inter" pitchFamily="34" charset="-122"/>
                 <a:cs typeface="Inter" pitchFamily="34" charset="-120"/>
               </a:rPr>
+              <a:t>금융</a:t>
+            </a:r>
+            <a:r>
+              <a:rPr lang="en-US" sz="1250" dirty="0">
+                <a:solidFill>
+                  <a:srgbClr val="333333"/>
+                </a:solidFill>
+                <a:latin typeface="Inter" pitchFamily="34" charset="0"/>
+                <a:ea typeface="Inter" pitchFamily="34" charset="-122"/>
+                <a:cs typeface="Inter" pitchFamily="34" charset="-120"/>
+              </a:rPr>
+              <a:t> 시계열 특유의 결측치, 휴장일, 이상치 문제를 해결하기 위한 정제 </a:t>
+            </a:r>
+            <a:r>
+              <a:rPr lang="en-US" sz="1250" dirty="0" err="1">
+                <a:solidFill>
+                  <a:srgbClr val="333333"/>
+                </a:solidFill>
+                <a:latin typeface="Inter" pitchFamily="34" charset="0"/>
+                <a:ea typeface="Inter" pitchFamily="34" charset="-122"/>
+                <a:cs typeface="Inter" pitchFamily="34" charset="-120"/>
+              </a:rPr>
               <a:t>프로세스를</a:t>
             </a:r>
             <a:r>
@@ -1548,7 +1570,81 @@
                 <a:ea typeface="Inter" pitchFamily="34" charset="-122"/>
                 <a:cs typeface="Inter" pitchFamily="34" charset="-120"/>
               </a:rPr>
-              <a:t>. 특히 Look-ahead bias를 방지하기 위해 시계열 순서를 엄격히 유지하며 전처리를 진행하여 분석의 </a:t>
+              <a:t>.</a:t>
+            </a:r>
+          </a:p>
+          <a:p>
+            <a:pPr marL="0" indent="0" algn="l">
+              <a:lnSpc>
+                <a:spcPct val="128000"/>
+              </a:lnSpc>
+              <a:buNone/>
+            </a:pPr>
+            <a:r>
+              <a:rPr lang="en-US" sz="1250" dirty="0">
+                <a:solidFill>
+                  <a:srgbClr val="333333"/>
+                </a:solidFill>
+                <a:latin typeface="Inter" pitchFamily="34" charset="0"/>
+                <a:ea typeface="Inter" pitchFamily="34" charset="-122"/>
+                <a:cs typeface="Inter" pitchFamily="34" charset="-120"/>
+              </a:rPr>
+              <a:t> </a:t>
+            </a:r>
+            <a:r>
+              <a:rPr lang="en-US" sz="1250" dirty="0" err="1">
+                <a:solidFill>
+                  <a:srgbClr val="333333"/>
+                </a:solidFill>
+                <a:latin typeface="Inter" pitchFamily="34" charset="0"/>
+                <a:ea typeface="Inter" pitchFamily="34" charset="-122"/>
+                <a:cs typeface="Inter" pitchFamily="34" charset="-120"/>
+              </a:rPr>
+              <a:t>특히</a:t>
+            </a:r>
+            <a:r>
+              <a:rPr lang="en-US" sz="1250" dirty="0">
+                <a:solidFill>
+                  <a:srgbClr val="333333"/>
+                </a:solidFill>
+                <a:latin typeface="Inter" pitchFamily="34" charset="0"/>
+                <a:ea typeface="Inter" pitchFamily="34" charset="-122"/>
+                <a:cs typeface="Inter" pitchFamily="34" charset="-120"/>
+              </a:rPr>
+              <a:t> </a:t>
+            </a:r>
+            <a:r>
+              <a:rPr lang="ko-KR" altLang="en-US" sz="1250" dirty="0">
+                <a:solidFill>
+                  <a:srgbClr val="333333"/>
+                </a:solidFill>
+                <a:latin typeface="Inter" pitchFamily="34" charset="0"/>
+                <a:ea typeface="Inter" pitchFamily="34" charset="-122"/>
+                <a:cs typeface="Inter" pitchFamily="34" charset="-120"/>
+              </a:rPr>
+              <a:t>미래 정보를 현재 시점의 모델 학습에 잘못 사용하는 문제를 </a:t>
+            </a:r>
+            <a:r>
+              <a:rPr lang="en-US" sz="1250" dirty="0" err="1">
+                <a:solidFill>
+                  <a:srgbClr val="333333"/>
+                </a:solidFill>
+                <a:latin typeface="Inter" pitchFamily="34" charset="0"/>
+                <a:ea typeface="Inter" pitchFamily="34" charset="-122"/>
+                <a:cs typeface="Inter" pitchFamily="34" charset="-120"/>
+              </a:rPr>
+              <a:t>방지하기</a:t>
+            </a:r>
+            <a:r>
+              <a:rPr lang="en-US" sz="1250" dirty="0">
+                <a:solidFill>
+                  <a:srgbClr val="333333"/>
+                </a:solidFill>
+                <a:latin typeface="Inter" pitchFamily="34" charset="0"/>
+                <a:ea typeface="Inter" pitchFamily="34" charset="-122"/>
+                <a:cs typeface="Inter" pitchFamily="34" charset="-120"/>
+              </a:rPr>
+              <a:t> 위해 시계열 순서를 엄격히 유지하며 전처리를 진행하여 분석의 </a:t>
             </a:r>
             <a:r>
               <a:rPr lang="en-US" sz="1250" dirty="0" err="1">
@@ -2124,7 +2220,7 @@
                 <a:ea typeface="Inter" pitchFamily="34" charset="-122"/>
                 <a:cs typeface="Inter" pitchFamily="34" charset="-120"/>
               </a:rPr>
-              <a:t> / </a:t>
+              <a:t>/</a:t>
             </a:r>
             <a:r>
               <a:rPr lang="en-US" sz="950" dirty="0" err="1">
@@ -2146,7 +2242,7 @@
                 <a:ea typeface="Inter" pitchFamily="34" charset="-122"/>
                 <a:cs typeface="Inter" pitchFamily="34" charset="-120"/>
               </a:rPr>
-              <a:t> / </a:t>
+              <a:t>/</a:t>
             </a:r>
             <a:r>
               <a:rPr lang="en-US" sz="950" dirty="0" err="1">
@@ -2927,7 +3023,7 @@
         <p:spPr>
           <a:xfrm>
             <a:off x="571500" y="2986422"/>
-            <a:ext cx="3643313" cy="162545"/>
+            <a:ext cx="3802990" cy="162545"/>
           </a:xfrm>
           <a:prstGeom prst="rect">
             <a:avLst/>
@@ -3056,7 +3152,7 @@
         <p:spPr>
           <a:xfrm>
             <a:off x="4929187" y="2986422"/>
-            <a:ext cx="3856367" cy="162545"/>
+            <a:ext cx="3929520" cy="162545"/>
           </a:xfrm>
           <a:prstGeom prst="rect">
             <a:avLst/>

--- a/추가산출물/team10중간발표자료.pptx
+++ b/추가산출물/team10중간발표자료.pptx
@@ -4732,7 +4732,7 @@
         <p:spPr>
           <a:xfrm>
             <a:off x="1285874" y="2123480"/>
-            <a:ext cx="7214387" cy="189411"/>
+            <a:ext cx="7286626" cy="189411"/>
           </a:xfrm>
           <a:prstGeom prst="rect">
             <a:avLst/>
@@ -5176,47 +5176,6 @@
               <a:t>.</a:t>
             </a:r>
             <a:endParaRPr lang="en-US" sz="1050" dirty="0"/>
-          </a:p>
-        </p:txBody>
-      </p:sp>
-      <p:sp>
-        <p:nvSpPr>
-          <p:cNvPr id="14" name="Text 11"/>
-          <p:cNvSpPr/>
-          <p:nvPr/>
-        </p:nvSpPr>
-        <p:spPr>
-          <a:xfrm>
-            <a:off x="571500" y="4422874"/>
-            <a:ext cx="8001000" cy="480417"/>
-          </a:xfrm>
-          <a:prstGeom prst="rect">
-            <a:avLst/>
-          </a:prstGeom>
-          <a:noFill/>
-          <a:ln/>
-        </p:spPr>
-        <p:txBody>
-          <a:bodyPr wrap="square" lIns="0" tIns="204089" rIns="0" bIns="0" rtlCol="0" anchor="t">
-            <a:spAutoFit/>
-          </a:bodyPr>
-          <a:lstStyle/>
-          <a:p>
-            <a:pPr marL="0" indent="0" algn="l">
-              <a:buNone/>
-            </a:pPr>
-            <a:r>
-              <a:rPr lang="en-US" sz="1600" b="1" dirty="0">
-                <a:solidFill>
-                  <a:srgbClr val="000000"/>
-                </a:solidFill>
-                <a:latin typeface="Inter ExtraBold" pitchFamily="34" charset="0"/>
-                <a:ea typeface="Inter ExtraBold" pitchFamily="34" charset="-122"/>
-                <a:cs typeface="Inter ExtraBold" pitchFamily="34" charset="-120"/>
-              </a:rPr>
-              <a:t>감사합니다.</a:t>
-            </a:r>
-            <a:endParaRPr lang="en-US" sz="1600" dirty="0"/>
           </a:p>
         </p:txBody>
       </p:sp>
